--- a/android-app/docs/media/presentation.pptx
+++ b/android-app/docs/media/presentation.pptx
@@ -5,18 +5,17 @@
     <p:sldMasterId id="2147483648" r:id="rId1"/>
   </p:sldMasterIdLst>
   <p:notesMasterIdLst>
-    <p:notesMasterId r:id="rId11"/>
+    <p:notesMasterId r:id="rId10"/>
   </p:notesMasterIdLst>
   <p:sldIdLst>
     <p:sldId id="256" r:id="rId2"/>
     <p:sldId id="257" r:id="rId3"/>
     <p:sldId id="258" r:id="rId4"/>
-    <p:sldId id="260" r:id="rId5"/>
-    <p:sldId id="261" r:id="rId6"/>
-    <p:sldId id="266" r:id="rId7"/>
-    <p:sldId id="262" r:id="rId8"/>
-    <p:sldId id="263" r:id="rId9"/>
-    <p:sldId id="265" r:id="rId10"/>
+    <p:sldId id="261" r:id="rId5"/>
+    <p:sldId id="266" r:id="rId6"/>
+    <p:sldId id="262" r:id="rId7"/>
+    <p:sldId id="267" r:id="rId8"/>
+    <p:sldId id="265" r:id="rId9"/>
   </p:sldIdLst>
   <p:sldSz cx="9144000" cy="6858000" type="screen4x3"/>
   <p:notesSz cx="6858000" cy="9144000"/>
@@ -216,7 +215,7 @@
           <a:p>
             <a:fld id="{73C728CA-2F84-40AF-962C-A0DF18C0B584}" type="datetimeFigureOut">
               <a:rPr lang="en-AU" smtClean="0"/>
-              <a:t>9/01/2026</a:t>
+              <a:t>2/05/2026</a:t>
             </a:fld>
             <a:endParaRPr lang="en-AU"/>
           </a:p>
@@ -549,7 +548,7 @@
           <a:p>
             <a:fld id="{E72EFF97-84A9-4008-B02D-3172FE690A7F}" type="slidenum">
               <a:rPr lang="en-AU" smtClean="0"/>
-              <a:t>5</a:t>
+              <a:t>4</a:t>
             </a:fld>
             <a:endParaRPr lang="en-AU"/>
           </a:p>
@@ -559,6 +558,90 @@
     <p:extLst>
       <p:ext uri="{BB962C8B-B14F-4D97-AF65-F5344CB8AC3E}">
         <p14:creationId xmlns:p14="http://schemas.microsoft.com/office/powerpoint/2010/main" val="1627892295"/>
+      </p:ext>
+    </p:extLst>
+  </p:cSld>
+  <p:clrMapOvr>
+    <a:masterClrMapping/>
+  </p:clrMapOvr>
+</p:notes>
+</file>
+
+<file path=ppt/notesSlides/notesSlide2.xml><?xml version="1.0" encoding="utf-8"?>
+<p:notes xmlns:a="http://schemas.openxmlformats.org/drawingml/2006/main" xmlns:r="http://schemas.openxmlformats.org/officeDocument/2006/relationships" xmlns:p="http://schemas.openxmlformats.org/presentationml/2006/main">
+  <p:cSld>
+    <p:spTree>
+      <p:nvGrpSpPr>
+        <p:cNvPr id="1" name=""/>
+        <p:cNvGrpSpPr/>
+        <p:nvPr/>
+      </p:nvGrpSpPr>
+      <p:grpSpPr>
+        <a:xfrm>
+          <a:off x="0" y="0"/>
+          <a:ext cx="0" cy="0"/>
+          <a:chOff x="0" y="0"/>
+          <a:chExt cx="0" cy="0"/>
+        </a:xfrm>
+      </p:grpSpPr>
+      <p:sp>
+        <p:nvSpPr>
+          <p:cNvPr id="2" name="Slide Image Placeholder 1"/>
+          <p:cNvSpPr>
+            <a:spLocks noGrp="1" noRot="1" noChangeAspect="1"/>
+          </p:cNvSpPr>
+          <p:nvPr>
+            <p:ph type="sldImg"/>
+          </p:nvPr>
+        </p:nvSpPr>
+        <p:spPr/>
+      </p:sp>
+      <p:sp>
+        <p:nvSpPr>
+          <p:cNvPr id="3" name="Notes Placeholder 2"/>
+          <p:cNvSpPr>
+            <a:spLocks noGrp="1"/>
+          </p:cNvSpPr>
+          <p:nvPr>
+            <p:ph type="body" idx="1"/>
+          </p:nvPr>
+        </p:nvSpPr>
+        <p:spPr/>
+        <p:txBody>
+          <a:bodyPr/>
+          <a:lstStyle/>
+          <a:p>
+            <a:endParaRPr lang="en-AU" dirty="0"/>
+          </a:p>
+        </p:txBody>
+      </p:sp>
+      <p:sp>
+        <p:nvSpPr>
+          <p:cNvPr id="4" name="Slide Number Placeholder 3"/>
+          <p:cNvSpPr>
+            <a:spLocks noGrp="1"/>
+          </p:cNvSpPr>
+          <p:nvPr>
+            <p:ph type="sldNum" sz="quarter" idx="5"/>
+          </p:nvPr>
+        </p:nvSpPr>
+        <p:spPr/>
+        <p:txBody>
+          <a:bodyPr/>
+          <a:lstStyle/>
+          <a:p>
+            <a:fld id="{E72EFF97-84A9-4008-B02D-3172FE690A7F}" type="slidenum">
+              <a:rPr lang="en-AU" smtClean="0"/>
+              <a:t>6</a:t>
+            </a:fld>
+            <a:endParaRPr lang="en-AU"/>
+          </a:p>
+        </p:txBody>
+      </p:sp>
+    </p:spTree>
+    <p:extLst>
+      <p:ext uri="{BB962C8B-B14F-4D97-AF65-F5344CB8AC3E}">
+        <p14:creationId xmlns:p14="http://schemas.microsoft.com/office/powerpoint/2010/main" val="2445500351"/>
       </p:ext>
     </p:extLst>
   </p:cSld>
@@ -747,7 +830,7 @@
           <a:p>
             <a:fld id="{5BCAD085-E8A6-8845-BD4E-CB4CCA059FC4}" type="datetimeFigureOut">
               <a:rPr lang="en-US" smtClean="0"/>
-              <a:t>1/9/2026</a:t>
+              <a:t>5/2/2026</a:t>
             </a:fld>
             <a:endParaRPr lang="en-US"/>
           </a:p>
@@ -915,7 +998,7 @@
           <a:p>
             <a:fld id="{5BCAD085-E8A6-8845-BD4E-CB4CCA059FC4}" type="datetimeFigureOut">
               <a:rPr lang="en-US" smtClean="0"/>
-              <a:t>1/9/2026</a:t>
+              <a:t>5/2/2026</a:t>
             </a:fld>
             <a:endParaRPr lang="en-US"/>
           </a:p>
@@ -1093,7 +1176,7 @@
           <a:p>
             <a:fld id="{5BCAD085-E8A6-8845-BD4E-CB4CCA059FC4}" type="datetimeFigureOut">
               <a:rPr lang="en-US" smtClean="0"/>
-              <a:t>1/9/2026</a:t>
+              <a:t>5/2/2026</a:t>
             </a:fld>
             <a:endParaRPr lang="en-US"/>
           </a:p>
@@ -1261,7 +1344,7 @@
           <a:p>
             <a:fld id="{5BCAD085-E8A6-8845-BD4E-CB4CCA059FC4}" type="datetimeFigureOut">
               <a:rPr lang="en-US" smtClean="0"/>
-              <a:t>1/9/2026</a:t>
+              <a:t>5/2/2026</a:t>
             </a:fld>
             <a:endParaRPr lang="en-US"/>
           </a:p>
@@ -1506,7 +1589,7 @@
           <a:p>
             <a:fld id="{5BCAD085-E8A6-8845-BD4E-CB4CCA059FC4}" type="datetimeFigureOut">
               <a:rPr lang="en-US" smtClean="0"/>
-              <a:t>1/9/2026</a:t>
+              <a:t>5/2/2026</a:t>
             </a:fld>
             <a:endParaRPr lang="en-US"/>
           </a:p>
@@ -1791,7 +1874,7 @@
           <a:p>
             <a:fld id="{5BCAD085-E8A6-8845-BD4E-CB4CCA059FC4}" type="datetimeFigureOut">
               <a:rPr lang="en-US" smtClean="0"/>
-              <a:t>1/9/2026</a:t>
+              <a:t>5/2/2026</a:t>
             </a:fld>
             <a:endParaRPr lang="en-US"/>
           </a:p>
@@ -2210,7 +2293,7 @@
           <a:p>
             <a:fld id="{5BCAD085-E8A6-8845-BD4E-CB4CCA059FC4}" type="datetimeFigureOut">
               <a:rPr lang="en-US" smtClean="0"/>
-              <a:t>1/9/2026</a:t>
+              <a:t>5/2/2026</a:t>
             </a:fld>
             <a:endParaRPr lang="en-US"/>
           </a:p>
@@ -2327,7 +2410,7 @@
           <a:p>
             <a:fld id="{5BCAD085-E8A6-8845-BD4E-CB4CCA059FC4}" type="datetimeFigureOut">
               <a:rPr lang="en-US" smtClean="0"/>
-              <a:t>1/9/2026</a:t>
+              <a:t>5/2/2026</a:t>
             </a:fld>
             <a:endParaRPr lang="en-US"/>
           </a:p>
@@ -2422,7 +2505,7 @@
           <a:p>
             <a:fld id="{5BCAD085-E8A6-8845-BD4E-CB4CCA059FC4}" type="datetimeFigureOut">
               <a:rPr lang="en-US" smtClean="0"/>
-              <a:t>1/9/2026</a:t>
+              <a:t>5/2/2026</a:t>
             </a:fld>
             <a:endParaRPr lang="en-US"/>
           </a:p>
@@ -2697,7 +2780,7 @@
           <a:p>
             <a:fld id="{5BCAD085-E8A6-8845-BD4E-CB4CCA059FC4}" type="datetimeFigureOut">
               <a:rPr lang="en-US" smtClean="0"/>
-              <a:t>1/9/2026</a:t>
+              <a:t>5/2/2026</a:t>
             </a:fld>
             <a:endParaRPr lang="en-US"/>
           </a:p>
@@ -2949,7 +3032,7 @@
           <a:p>
             <a:fld id="{5BCAD085-E8A6-8845-BD4E-CB4CCA059FC4}" type="datetimeFigureOut">
               <a:rPr lang="en-US" smtClean="0"/>
-              <a:t>1/9/2026</a:t>
+              <a:t>5/2/2026</a:t>
             </a:fld>
             <a:endParaRPr lang="en-US"/>
           </a:p>
@@ -3160,7 +3243,7 @@
           <a:p>
             <a:fld id="{5BCAD085-E8A6-8845-BD4E-CB4CCA059FC4}" type="datetimeFigureOut">
               <a:rPr lang="en-US" smtClean="0"/>
-              <a:t>1/9/2026</a:t>
+              <a:t>5/2/2026</a:t>
             </a:fld>
             <a:endParaRPr lang="en-US"/>
           </a:p>
@@ -3701,7 +3784,11 @@
             </a:pPr>
             <a:r>
               <a:rPr sz="2800" dirty="0" err="1"/>
-              <a:t>Сложные</a:t>
+              <a:t>Сложны</a:t>
+            </a:r>
+            <a:r>
+              <a:rPr lang="ru-RU" sz="2800" dirty="0"/>
+              <a:t>й</a:t>
             </a:r>
             <a:r>
               <a:rPr sz="2800" dirty="0"/>
@@ -3709,9 +3796,9 @@
             </a:r>
             <a:r>
               <a:rPr sz="2800" dirty="0" err="1"/>
-              <a:t>интерфейсы</a:t>
-            </a:r>
-            <a:endParaRPr sz="2800" dirty="0"/>
+              <a:t>интерфейс</a:t>
+            </a:r>
+            <a:endParaRPr lang="ru-RU" sz="2800" dirty="0"/>
           </a:p>
           <a:p>
             <a:pPr>
@@ -3827,33 +3914,19 @@
         </p:nvSpPr>
         <p:spPr>
           <a:xfrm>
-            <a:off x="457200" y="2084285"/>
-            <a:ext cx="4159250" cy="4525963"/>
+            <a:off x="457198" y="1583488"/>
+            <a:ext cx="5368565" cy="4525963"/>
           </a:xfrm>
         </p:spPr>
         <p:txBody>
-          <a:bodyPr/>
-          <a:lstStyle/>
-          <a:p>
-            <a:r>
-              <a:rPr dirty="0" err="1"/>
-              <a:t>Создать</a:t>
-            </a:r>
-            <a:r>
-              <a:rPr dirty="0"/>
-              <a:t> </a:t>
-            </a:r>
-            <a:r>
-              <a:rPr dirty="0" err="1"/>
-              <a:t>удобное</a:t>
-            </a:r>
-            <a:r>
-              <a:rPr dirty="0"/>
-              <a:t> </a:t>
-            </a:r>
+          <a:bodyPr>
+            <a:normAutofit/>
+          </a:bodyPr>
+          <a:lstStyle/>
+          <a:p>
             <a:r>
               <a:rPr lang="ru-RU" dirty="0"/>
-              <a:t>приложение</a:t>
+              <a:t>Реализовать интерфейс</a:t>
             </a:r>
           </a:p>
           <a:p>
@@ -3861,31 +3934,17 @@
           </a:p>
           <a:p>
             <a:r>
-              <a:rPr dirty="0" err="1"/>
-              <a:t>Упростить</a:t>
-            </a:r>
-            <a:r>
-              <a:rPr dirty="0"/>
-              <a:t> </a:t>
-            </a:r>
-            <a:r>
-              <a:rPr dirty="0" err="1"/>
-              <a:t>доступ</a:t>
-            </a:r>
-            <a:r>
-              <a:rPr dirty="0"/>
-              <a:t> </a:t>
-            </a:r>
-            <a:br>
               <a:rPr lang="ru-RU" dirty="0"/>
-            </a:br>
-            <a:r>
-              <a:rPr dirty="0"/>
-              <a:t>к </a:t>
-            </a:r>
-            <a:r>
-              <a:rPr dirty="0" err="1"/>
-              <a:t>криптовалюте</a:t>
+              <a:t>Система покупки криптовалюты</a:t>
+            </a:r>
+          </a:p>
+          <a:p>
+            <a:endParaRPr lang="ru-RU" dirty="0"/>
+          </a:p>
+          <a:p>
+            <a:r>
+              <a:rPr lang="ru-RU" dirty="0"/>
+              <a:t>Система анализа портфеля и криптовалют</a:t>
             </a:r>
             <a:endParaRPr dirty="0"/>
           </a:p>
@@ -3958,125 +4017,6 @@
         </p:nvSpPr>
         <p:spPr/>
         <p:txBody>
-          <a:bodyPr/>
-          <a:lstStyle/>
-          <a:p>
-            <a:r>
-              <a:t>Актуальность</a:t>
-            </a:r>
-          </a:p>
-        </p:txBody>
-      </p:sp>
-      <p:sp>
-        <p:nvSpPr>
-          <p:cNvPr id="3" name="Content Placeholder 2"/>
-          <p:cNvSpPr>
-            <a:spLocks noGrp="1"/>
-          </p:cNvSpPr>
-          <p:nvPr>
-            <p:ph idx="1"/>
-          </p:nvPr>
-        </p:nvSpPr>
-        <p:spPr/>
-        <p:txBody>
-          <a:bodyPr/>
-          <a:lstStyle/>
-          <a:p>
-            <a:r>
-              <a:t>Рост популярности криптовалют</a:t>
-            </a:r>
-          </a:p>
-          <a:p>
-            <a:r>
-              <a:t>Мобильные финтех-решения</a:t>
-            </a:r>
-          </a:p>
-        </p:txBody>
-      </p:sp>
-      <p:pic>
-        <p:nvPicPr>
-          <p:cNvPr id="2050" name="Picture 2" descr="Crypto Exchange Website - Dark UI by Seyda Kurt on Dribbble">
-            <a:extLst>
-              <a:ext uri="{FF2B5EF4-FFF2-40B4-BE49-F238E27FC236}">
-                <a16:creationId xmlns:a16="http://schemas.microsoft.com/office/drawing/2014/main" id="{66E5CEAB-EE93-E7C2-274F-FD58D91B46F8}"/>
-              </a:ext>
-            </a:extLst>
-          </p:cNvPr>
-          <p:cNvPicPr>
-            <a:picLocks noChangeAspect="1" noChangeArrowheads="1"/>
-          </p:cNvPicPr>
-          <p:nvPr/>
-        </p:nvPicPr>
-        <p:blipFill>
-          <a:blip r:embed="rId2">
-            <a:extLst>
-              <a:ext uri="{28A0092B-C50C-407E-A947-70E740481C1C}">
-                <a14:useLocalDpi xmlns:a14="http://schemas.microsoft.com/office/drawing/2010/main" val="0"/>
-              </a:ext>
-            </a:extLst>
-          </a:blip>
-          <a:srcRect/>
-          <a:stretch>
-            <a:fillRect/>
-          </a:stretch>
-        </p:blipFill>
-        <p:spPr bwMode="auto">
-          <a:xfrm>
-            <a:off x="2419023" y="2872408"/>
-            <a:ext cx="4305953" cy="3253755"/>
-          </a:xfrm>
-          <a:prstGeom prst="rect">
-            <a:avLst/>
-          </a:prstGeom>
-          <a:noFill/>
-          <a:extLst>
-            <a:ext uri="{909E8E84-426E-40DD-AFC4-6F175D3DCCD1}">
-              <a14:hiddenFill xmlns:a14="http://schemas.microsoft.com/office/drawing/2010/main">
-                <a:solidFill>
-                  <a:srgbClr val="FFFFFF"/>
-                </a:solidFill>
-              </a14:hiddenFill>
-            </a:ext>
-          </a:extLst>
-        </p:spPr>
-      </p:pic>
-    </p:spTree>
-  </p:cSld>
-  <p:clrMapOvr>
-    <a:masterClrMapping/>
-  </p:clrMapOvr>
-</p:sld>
-</file>
-
-<file path=ppt/slides/slide5.xml><?xml version="1.0" encoding="utf-8"?>
-<p:sld xmlns:a="http://schemas.openxmlformats.org/drawingml/2006/main" xmlns:r="http://schemas.openxmlformats.org/officeDocument/2006/relationships" xmlns:p="http://schemas.openxmlformats.org/presentationml/2006/main">
-  <p:cSld>
-    <p:spTree>
-      <p:nvGrpSpPr>
-        <p:cNvPr id="1" name=""/>
-        <p:cNvGrpSpPr/>
-        <p:nvPr/>
-      </p:nvGrpSpPr>
-      <p:grpSpPr>
-        <a:xfrm>
-          <a:off x="0" y="0"/>
-          <a:ext cx="0" cy="0"/>
-          <a:chOff x="0" y="0"/>
-          <a:chExt cx="0" cy="0"/>
-        </a:xfrm>
-      </p:grpSpPr>
-      <p:sp>
-        <p:nvSpPr>
-          <p:cNvPr id="2" name="Title 1"/>
-          <p:cNvSpPr>
-            <a:spLocks noGrp="1"/>
-          </p:cNvSpPr>
-          <p:nvPr>
-            <p:ph type="title"/>
-          </p:nvPr>
-        </p:nvSpPr>
-        <p:spPr/>
-        <p:txBody>
           <a:bodyPr>
             <a:normAutofit/>
           </a:bodyPr>
@@ -4129,7 +4069,14 @@
               </a:rPr>
               <a:t>проект</a:t>
             </a:r>
-            <a:endParaRPr lang="ru-RU" sz="2400" dirty="0"/>
+            <a:r>
+              <a:rPr lang="en-US" sz="2400" dirty="0"/>
+              <a:t> </a:t>
+            </a:r>
+            <a:r>
+              <a:rPr lang="ru-RU" sz="2400" dirty="0"/>
+              <a:t>в фигме</a:t>
+            </a:r>
           </a:p>
           <a:p>
             <a:pPr marL="0" indent="0">
@@ -4183,7 +4130,7 @@
 </p:sld>
 </file>
 
-<file path=ppt/slides/slide6.xml><?xml version="1.0" encoding="utf-8"?>
+<file path=ppt/slides/slide5.xml><?xml version="1.0" encoding="utf-8"?>
 <p:sld xmlns:a="http://schemas.openxmlformats.org/drawingml/2006/main" xmlns:r="http://schemas.openxmlformats.org/officeDocument/2006/relationships" xmlns:p="http://schemas.openxmlformats.org/presentationml/2006/main">
   <p:cSld>
     <p:spTree>
@@ -4247,8 +4194,25 @@
         </p:nvSpPr>
         <p:spPr/>
         <p:txBody>
-          <a:bodyPr/>
-          <a:lstStyle/>
+          <a:bodyPr>
+            <a:normAutofit lnSpcReduction="10000"/>
+          </a:bodyPr>
+          <a:lstStyle/>
+          <a:p>
+            <a:pPr marL="0" indent="0">
+              <a:buNone/>
+            </a:pPr>
+            <a:r>
+              <a:rPr lang="ru-RU" dirty="0"/>
+              <a:t>Фронтенд:</a:t>
+            </a:r>
+          </a:p>
+          <a:p>
+            <a:r>
+              <a:rPr lang="en-US" dirty="0"/>
+              <a:t>Kotlin</a:t>
+            </a:r>
+          </a:p>
           <a:p>
             <a:r>
               <a:rPr lang="en-US" dirty="0"/>
@@ -4264,23 +4228,32 @@
           </a:p>
           <a:p>
             <a:r>
-              <a:rPr lang="en-US" dirty="0"/>
-              <a:t>Coil</a:t>
-            </a:r>
-          </a:p>
-          <a:p>
-            <a:r>
               <a:rPr lang="en-US" dirty="0" err="1"/>
               <a:t>Vico</a:t>
             </a:r>
             <a:endParaRPr lang="en-US" dirty="0"/>
           </a:p>
           <a:p>
+            <a:pPr marL="0" indent="0">
+              <a:buNone/>
+            </a:pPr>
+            <a:r>
+              <a:rPr lang="ru-RU" dirty="0"/>
+              <a:t>Бэкенд:</a:t>
+            </a:r>
+          </a:p>
+          <a:p>
+            <a:r>
+              <a:rPr lang="en-US" dirty="0"/>
+              <a:t>Spring boot</a:t>
+            </a:r>
+          </a:p>
+          <a:p>
             <a:r>
               <a:rPr lang="en-US" dirty="0" err="1"/>
-              <a:t>Threetenabp</a:t>
-            </a:r>
-            <a:endParaRPr lang="ru-RU" dirty="0"/>
+              <a:t>Postgresql</a:t>
+            </a:r>
+            <a:endParaRPr lang="en-US" dirty="0"/>
           </a:p>
         </p:txBody>
       </p:sp>
@@ -4313,55 +4286,8 @@
         </p:blipFill>
         <p:spPr bwMode="auto">
           <a:xfrm>
-            <a:off x="4358554" y="1417638"/>
-            <a:ext cx="4785446" cy="2512359"/>
-          </a:xfrm>
-          <a:prstGeom prst="rect">
-            <a:avLst/>
-          </a:prstGeom>
-          <a:noFill/>
-          <a:extLst>
-            <a:ext uri="{909E8E84-426E-40DD-AFC4-6F175D3DCCD1}">
-              <a14:hiddenFill xmlns:a14="http://schemas.microsoft.com/office/drawing/2010/main">
-                <a:solidFill>
-                  <a:srgbClr val="FFFFFF"/>
-                </a:solidFill>
-              </a14:hiddenFill>
-            </a:ext>
-          </a:extLst>
-        </p:spPr>
-      </p:pic>
-      <p:pic>
-        <p:nvPicPr>
-          <p:cNvPr id="1031" name="Picture 7" descr="Getting Started with Retrofit in Android Kotlin: Making Network Requests  Made Easy | by Tom | Medium">
-            <a:extLst>
-              <a:ext uri="{FF2B5EF4-FFF2-40B4-BE49-F238E27FC236}">
-                <a16:creationId xmlns:a16="http://schemas.microsoft.com/office/drawing/2014/main" id="{C648EE26-97EE-69C3-7D55-C1CF47EA9C82}"/>
-              </a:ext>
-            </a:extLst>
-          </p:cNvPr>
-          <p:cNvPicPr>
-            <a:picLocks noChangeAspect="1" noChangeArrowheads="1"/>
-          </p:cNvPicPr>
-          <p:nvPr/>
-        </p:nvPicPr>
-        <p:blipFill>
-          <a:blip r:embed="rId3">
-            <a:extLst>
-              <a:ext uri="{28A0092B-C50C-407E-A947-70E740481C1C}">
-                <a14:useLocalDpi xmlns:a14="http://schemas.microsoft.com/office/drawing/2010/main" val="0"/>
-              </a:ext>
-            </a:extLst>
-          </a:blip>
-          <a:srcRect/>
-          <a:stretch>
-            <a:fillRect/>
-          </a:stretch>
-        </p:blipFill>
-        <p:spPr bwMode="auto">
-          <a:xfrm>
-            <a:off x="4720771" y="4246742"/>
-            <a:ext cx="4061012" cy="1419239"/>
+            <a:off x="4358554" y="1417639"/>
+            <a:ext cx="3831166" cy="2011362"/>
           </a:xfrm>
           <a:prstGeom prst="rect">
             <a:avLst/>
@@ -4391,6 +4317,148 @@
 </p:sld>
 </file>
 
+<file path=ppt/slides/slide6.xml><?xml version="1.0" encoding="utf-8"?>
+<p:sld xmlns:a="http://schemas.openxmlformats.org/drawingml/2006/main" xmlns:r="http://schemas.openxmlformats.org/officeDocument/2006/relationships" xmlns:p="http://schemas.openxmlformats.org/presentationml/2006/main">
+  <p:cSld>
+    <p:spTree>
+      <p:nvGrpSpPr>
+        <p:cNvPr id="1" name=""/>
+        <p:cNvGrpSpPr/>
+        <p:nvPr/>
+      </p:nvGrpSpPr>
+      <p:grpSpPr>
+        <a:xfrm>
+          <a:off x="0" y="0"/>
+          <a:ext cx="0" cy="0"/>
+          <a:chOff x="0" y="0"/>
+          <a:chExt cx="0" cy="0"/>
+        </a:xfrm>
+      </p:grpSpPr>
+      <p:sp>
+        <p:nvSpPr>
+          <p:cNvPr id="2" name="Title 1"/>
+          <p:cNvSpPr>
+            <a:spLocks noGrp="1"/>
+          </p:cNvSpPr>
+          <p:nvPr>
+            <p:ph type="title"/>
+          </p:nvPr>
+        </p:nvSpPr>
+        <p:spPr/>
+        <p:txBody>
+          <a:bodyPr/>
+          <a:lstStyle/>
+          <a:p>
+            <a:r>
+              <a:rPr dirty="0" err="1"/>
+              <a:t>Функционал</a:t>
+            </a:r>
+            <a:r>
+              <a:rPr lang="ru-RU" dirty="0"/>
+              <a:t>. Главное меню</a:t>
+            </a:r>
+            <a:endParaRPr dirty="0"/>
+          </a:p>
+        </p:txBody>
+      </p:sp>
+      <p:pic>
+        <p:nvPicPr>
+          <p:cNvPr id="5" name="Picture 4">
+            <a:extLst>
+              <a:ext uri="{FF2B5EF4-FFF2-40B4-BE49-F238E27FC236}">
+                <a16:creationId xmlns:a16="http://schemas.microsoft.com/office/drawing/2014/main" id="{2A7C9399-95CB-7856-DFE4-578F2FF65AA9}"/>
+              </a:ext>
+            </a:extLst>
+          </p:cNvPr>
+          <p:cNvPicPr>
+            <a:picLocks noChangeAspect="1"/>
+          </p:cNvPicPr>
+          <p:nvPr/>
+        </p:nvPicPr>
+        <p:blipFill>
+          <a:blip r:embed="rId3"/>
+          <a:stretch>
+            <a:fillRect/>
+          </a:stretch>
+        </p:blipFill>
+        <p:spPr>
+          <a:xfrm>
+            <a:off x="3397549" y="1327183"/>
+            <a:ext cx="2348902" cy="4966447"/>
+          </a:xfrm>
+          <a:prstGeom prst="rect">
+            <a:avLst/>
+          </a:prstGeom>
+        </p:spPr>
+      </p:pic>
+      <p:pic>
+        <p:nvPicPr>
+          <p:cNvPr id="12" name="Picture 11">
+            <a:extLst>
+              <a:ext uri="{FF2B5EF4-FFF2-40B4-BE49-F238E27FC236}">
+                <a16:creationId xmlns:a16="http://schemas.microsoft.com/office/drawing/2014/main" id="{F7C351C2-0022-69DB-0682-2385457CABDF}"/>
+              </a:ext>
+            </a:extLst>
+          </p:cNvPr>
+          <p:cNvPicPr>
+            <a:picLocks noChangeAspect="1"/>
+          </p:cNvPicPr>
+          <p:nvPr/>
+        </p:nvPicPr>
+        <p:blipFill>
+          <a:blip r:embed="rId4"/>
+          <a:stretch>
+            <a:fillRect/>
+          </a:stretch>
+        </p:blipFill>
+        <p:spPr>
+          <a:xfrm>
+            <a:off x="457200" y="1327183"/>
+            <a:ext cx="2348902" cy="4984422"/>
+          </a:xfrm>
+          <a:prstGeom prst="rect">
+            <a:avLst/>
+          </a:prstGeom>
+        </p:spPr>
+      </p:pic>
+      <p:pic>
+        <p:nvPicPr>
+          <p:cNvPr id="14" name="Picture 13">
+            <a:extLst>
+              <a:ext uri="{FF2B5EF4-FFF2-40B4-BE49-F238E27FC236}">
+                <a16:creationId xmlns:a16="http://schemas.microsoft.com/office/drawing/2014/main" id="{0F4B6746-E22C-FDDD-A0BC-CA2538E4686C}"/>
+              </a:ext>
+            </a:extLst>
+          </p:cNvPr>
+          <p:cNvPicPr>
+            <a:picLocks noChangeAspect="1"/>
+          </p:cNvPicPr>
+          <p:nvPr/>
+        </p:nvPicPr>
+        <p:blipFill>
+          <a:blip r:embed="rId5"/>
+          <a:stretch>
+            <a:fillRect/>
+          </a:stretch>
+        </p:blipFill>
+        <p:spPr>
+          <a:xfrm>
+            <a:off x="6337898" y="1327183"/>
+            <a:ext cx="2348902" cy="4984422"/>
+          </a:xfrm>
+          <a:prstGeom prst="rect">
+            <a:avLst/>
+          </a:prstGeom>
+        </p:spPr>
+      </p:pic>
+    </p:spTree>
+  </p:cSld>
+  <p:clrMapOvr>
+    <a:masterClrMapping/>
+  </p:clrMapOvr>
+</p:sld>
+</file>
+
 <file path=ppt/slides/slide7.xml><?xml version="1.0" encoding="utf-8"?>
 <p:sld xmlns:a="http://schemas.openxmlformats.org/drawingml/2006/main" xmlns:r="http://schemas.openxmlformats.org/officeDocument/2006/relationships" xmlns:p="http://schemas.openxmlformats.org/presentationml/2006/main">
   <p:cSld>
@@ -4408,115 +4476,12 @@
           <a:chExt cx="0" cy="0"/>
         </a:xfrm>
       </p:grpSpPr>
-      <p:sp>
-        <p:nvSpPr>
-          <p:cNvPr id="2" name="Title 1"/>
-          <p:cNvSpPr>
-            <a:spLocks noGrp="1"/>
-          </p:cNvSpPr>
-          <p:nvPr>
-            <p:ph type="title"/>
-          </p:nvPr>
-        </p:nvSpPr>
-        <p:spPr/>
-        <p:txBody>
-          <a:bodyPr/>
-          <a:lstStyle/>
-          <a:p>
-            <a:r>
-              <a:rPr dirty="0" err="1"/>
-              <a:t>Функционал</a:t>
-            </a:r>
-            <a:endParaRPr dirty="0"/>
-          </a:p>
-        </p:txBody>
-      </p:sp>
-      <p:sp>
-        <p:nvSpPr>
-          <p:cNvPr id="3" name="Content Placeholder 2"/>
-          <p:cNvSpPr>
-            <a:spLocks noGrp="1"/>
-          </p:cNvSpPr>
-          <p:nvPr>
-            <p:ph idx="1"/>
-          </p:nvPr>
-        </p:nvSpPr>
-        <p:spPr/>
-        <p:txBody>
-          <a:bodyPr/>
-          <a:lstStyle/>
-          <a:p>
-            <a:pPr>
-              <a:lnSpc>
-                <a:spcPct val="200000"/>
-              </a:lnSpc>
-            </a:pPr>
-            <a:r>
-              <a:rPr dirty="0" err="1"/>
-              <a:t>Торговля</a:t>
-            </a:r>
-            <a:r>
-              <a:rPr dirty="0"/>
-              <a:t> </a:t>
-            </a:r>
-            <a:r>
-              <a:rPr dirty="0" err="1"/>
-              <a:t>криптовалютой</a:t>
-            </a:r>
-            <a:endParaRPr dirty="0"/>
-          </a:p>
-          <a:p>
-            <a:pPr>
-              <a:lnSpc>
-                <a:spcPct val="200000"/>
-              </a:lnSpc>
-            </a:pPr>
-            <a:r>
-              <a:rPr dirty="0" err="1"/>
-              <a:t>Кошелек</a:t>
-            </a:r>
-            <a:endParaRPr dirty="0"/>
-          </a:p>
-          <a:p>
-            <a:pPr>
-              <a:lnSpc>
-                <a:spcPct val="200000"/>
-              </a:lnSpc>
-            </a:pPr>
-            <a:r>
-              <a:rPr dirty="0" err="1"/>
-              <a:t>История</a:t>
-            </a:r>
-            <a:r>
-              <a:rPr dirty="0"/>
-              <a:t> </a:t>
-            </a:r>
-            <a:r>
-              <a:rPr dirty="0" err="1"/>
-              <a:t>транзакций</a:t>
-            </a:r>
-            <a:endParaRPr dirty="0"/>
-          </a:p>
-          <a:p>
-            <a:pPr>
-              <a:lnSpc>
-                <a:spcPct val="200000"/>
-              </a:lnSpc>
-            </a:pPr>
-            <a:r>
-              <a:rPr lang="ru-RU" dirty="0"/>
-              <a:t>Просмотр портфолио</a:t>
-            </a:r>
-            <a:endParaRPr dirty="0"/>
-          </a:p>
-        </p:txBody>
-      </p:sp>
       <p:pic>
         <p:nvPicPr>
-          <p:cNvPr id="5" name="Picture 4">
+          <p:cNvPr id="10" name="Picture 9">
             <a:extLst>
               <a:ext uri="{FF2B5EF4-FFF2-40B4-BE49-F238E27FC236}">
-                <a16:creationId xmlns:a16="http://schemas.microsoft.com/office/drawing/2014/main" id="{2A7C9399-95CB-7856-DFE4-578F2FF65AA9}"/>
+                <a16:creationId xmlns:a16="http://schemas.microsoft.com/office/drawing/2014/main" id="{D0C6B70B-5C8F-7D59-4C29-119FA1A3DBA4}"/>
               </a:ext>
             </a:extLst>
           </p:cNvPr>
@@ -4533,7 +4498,7 @@
         </p:blipFill>
         <p:spPr>
           <a:xfrm>
-            <a:off x="6337898" y="1379957"/>
+            <a:off x="457200" y="1162593"/>
             <a:ext cx="2348902" cy="4966447"/>
           </a:xfrm>
           <a:prstGeom prst="rect">
@@ -4541,7 +4506,112 @@
           </a:prstGeom>
         </p:spPr>
       </p:pic>
+      <p:sp>
+        <p:nvSpPr>
+          <p:cNvPr id="7" name="TextBox 6">
+            <a:extLst>
+              <a:ext uri="{FF2B5EF4-FFF2-40B4-BE49-F238E27FC236}">
+                <a16:creationId xmlns:a16="http://schemas.microsoft.com/office/drawing/2014/main" id="{2C39DFE7-773E-E2B0-AD6A-80359164529E}"/>
+              </a:ext>
+            </a:extLst>
+          </p:cNvPr>
+          <p:cNvSpPr txBox="1"/>
+          <p:nvPr/>
+        </p:nvSpPr>
+        <p:spPr>
+          <a:xfrm>
+            <a:off x="457200" y="268825"/>
+            <a:ext cx="7913802" cy="769441"/>
+          </a:xfrm>
+          <a:prstGeom prst="rect">
+            <a:avLst/>
+          </a:prstGeom>
+          <a:noFill/>
+        </p:spPr>
+        <p:txBody>
+          <a:bodyPr wrap="square">
+            <a:spAutoFit/>
+          </a:bodyPr>
+          <a:lstStyle/>
+          <a:p>
+            <a:r>
+              <a:rPr lang="ru-RU" sz="4400" dirty="0">
+                <a:latin typeface="+mj-lt"/>
+              </a:rPr>
+              <a:t>Функционал. Меню торговли</a:t>
+            </a:r>
+            <a:endParaRPr lang="en-AU" sz="4400" dirty="0">
+              <a:latin typeface="+mj-lt"/>
+            </a:endParaRPr>
+          </a:p>
+        </p:txBody>
+      </p:sp>
+      <p:pic>
+        <p:nvPicPr>
+          <p:cNvPr id="9" name="Picture 8">
+            <a:extLst>
+              <a:ext uri="{FF2B5EF4-FFF2-40B4-BE49-F238E27FC236}">
+                <a16:creationId xmlns:a16="http://schemas.microsoft.com/office/drawing/2014/main" id="{B9AEFB4E-6B52-1AE8-5C8C-9EACF90FB1B4}"/>
+              </a:ext>
+            </a:extLst>
+          </p:cNvPr>
+          <p:cNvPicPr>
+            <a:picLocks noChangeAspect="1"/>
+          </p:cNvPicPr>
+          <p:nvPr/>
+        </p:nvPicPr>
+        <p:blipFill>
+          <a:blip r:embed="rId3"/>
+          <a:stretch>
+            <a:fillRect/>
+          </a:stretch>
+        </p:blipFill>
+        <p:spPr>
+          <a:xfrm>
+            <a:off x="3505956" y="1162592"/>
+            <a:ext cx="2348901" cy="4966447"/>
+          </a:xfrm>
+          <a:prstGeom prst="rect">
+            <a:avLst/>
+          </a:prstGeom>
+        </p:spPr>
+      </p:pic>
+      <p:pic>
+        <p:nvPicPr>
+          <p:cNvPr id="12" name="Picture 11">
+            <a:extLst>
+              <a:ext uri="{FF2B5EF4-FFF2-40B4-BE49-F238E27FC236}">
+                <a16:creationId xmlns:a16="http://schemas.microsoft.com/office/drawing/2014/main" id="{45AD599B-6E55-1909-9BCD-64CC289D3027}"/>
+              </a:ext>
+            </a:extLst>
+          </p:cNvPr>
+          <p:cNvPicPr>
+            <a:picLocks noChangeAspect="1"/>
+          </p:cNvPicPr>
+          <p:nvPr/>
+        </p:nvPicPr>
+        <p:blipFill>
+          <a:blip r:embed="rId4"/>
+          <a:stretch>
+            <a:fillRect/>
+          </a:stretch>
+        </p:blipFill>
+        <p:spPr>
+          <a:xfrm>
+            <a:off x="6554711" y="1176637"/>
+            <a:ext cx="2348902" cy="4938356"/>
+          </a:xfrm>
+          <a:prstGeom prst="rect">
+            <a:avLst/>
+          </a:prstGeom>
+        </p:spPr>
+      </p:pic>
     </p:spTree>
+    <p:extLst>
+      <p:ext uri="{BB962C8B-B14F-4D97-AF65-F5344CB8AC3E}">
+        <p14:creationId xmlns:p14="http://schemas.microsoft.com/office/powerpoint/2010/main" val="3179639199"/>
+      </p:ext>
+    </p:extLst>
   </p:cSld>
   <p:clrMapOvr>
     <a:masterClrMapping/>
@@ -4582,7 +4652,7 @@
           <a:lstStyle/>
           <a:p>
             <a:r>
-              <a:t>Дизайн</a:t>
+              <a:t>Заключение</a:t>
             </a:r>
           </a:p>
         </p:txBody>
@@ -4602,157 +4672,12 @@
           <a:bodyPr/>
           <a:lstStyle/>
           <a:p>
-            <a:pPr>
-              <a:lnSpc>
-                <a:spcPct val="200000"/>
-              </a:lnSpc>
+            <a:pPr marL="0" indent="0">
+              <a:buNone/>
             </a:pPr>
             <a:r>
-              <a:rPr dirty="0" err="1"/>
-              <a:t>Тёмный</a:t>
-            </a:r>
-            <a:r>
-              <a:rPr dirty="0"/>
-              <a:t> </a:t>
-            </a:r>
-            <a:r>
-              <a:rPr dirty="0" err="1"/>
-              <a:t>фон</a:t>
-            </a:r>
-            <a:endParaRPr dirty="0"/>
-          </a:p>
-          <a:p>
-            <a:pPr>
-              <a:lnSpc>
-                <a:spcPct val="200000"/>
-              </a:lnSpc>
-            </a:pPr>
-            <a:r>
-              <a:rPr dirty="0" err="1"/>
-              <a:t>Неоновые</a:t>
-            </a:r>
-            <a:r>
-              <a:rPr dirty="0"/>
-              <a:t> </a:t>
-            </a:r>
-            <a:r>
-              <a:rPr dirty="0" err="1"/>
-              <a:t>акценты</a:t>
-            </a:r>
-            <a:endParaRPr dirty="0"/>
-          </a:p>
-          <a:p>
-            <a:pPr>
-              <a:lnSpc>
-                <a:spcPct val="200000"/>
-              </a:lnSpc>
-            </a:pPr>
-            <a:r>
-              <a:rPr dirty="0"/>
-              <a:t>Web3 </a:t>
-            </a:r>
-            <a:r>
-              <a:rPr dirty="0" err="1"/>
-              <a:t>стиль</a:t>
-            </a:r>
-            <a:endParaRPr dirty="0"/>
-          </a:p>
-        </p:txBody>
-      </p:sp>
-      <p:pic>
-        <p:nvPicPr>
-          <p:cNvPr id="5" name="Picture 4">
-            <a:extLst>
-              <a:ext uri="{FF2B5EF4-FFF2-40B4-BE49-F238E27FC236}">
-                <a16:creationId xmlns:a16="http://schemas.microsoft.com/office/drawing/2014/main" id="{68A4E407-0CE9-0A71-00CD-C82851B49BCB}"/>
-              </a:ext>
-            </a:extLst>
-          </p:cNvPr>
-          <p:cNvPicPr>
-            <a:picLocks noChangeAspect="1"/>
-          </p:cNvPicPr>
-          <p:nvPr/>
-        </p:nvPicPr>
-        <p:blipFill>
-          <a:blip r:embed="rId2"/>
-          <a:stretch>
-            <a:fillRect/>
-          </a:stretch>
-        </p:blipFill>
-        <p:spPr>
-          <a:xfrm>
-            <a:off x="6355976" y="1350916"/>
-            <a:ext cx="2330824" cy="5024530"/>
-          </a:xfrm>
-          <a:prstGeom prst="rect">
-            <a:avLst/>
-          </a:prstGeom>
-        </p:spPr>
-      </p:pic>
-    </p:spTree>
-  </p:cSld>
-  <p:clrMapOvr>
-    <a:masterClrMapping/>
-  </p:clrMapOvr>
-</p:sld>
-</file>
-
-<file path=ppt/slides/slide9.xml><?xml version="1.0" encoding="utf-8"?>
-<p:sld xmlns:a="http://schemas.openxmlformats.org/drawingml/2006/main" xmlns:r="http://schemas.openxmlformats.org/officeDocument/2006/relationships" xmlns:p="http://schemas.openxmlformats.org/presentationml/2006/main">
-  <p:cSld>
-    <p:spTree>
-      <p:nvGrpSpPr>
-        <p:cNvPr id="1" name=""/>
-        <p:cNvGrpSpPr/>
-        <p:nvPr/>
-      </p:nvGrpSpPr>
-      <p:grpSpPr>
-        <a:xfrm>
-          <a:off x="0" y="0"/>
-          <a:ext cx="0" cy="0"/>
-          <a:chOff x="0" y="0"/>
-          <a:chExt cx="0" cy="0"/>
-        </a:xfrm>
-      </p:grpSpPr>
-      <p:sp>
-        <p:nvSpPr>
-          <p:cNvPr id="2" name="Title 1"/>
-          <p:cNvSpPr>
-            <a:spLocks noGrp="1"/>
-          </p:cNvSpPr>
-          <p:nvPr>
-            <p:ph type="title"/>
-          </p:nvPr>
-        </p:nvSpPr>
-        <p:spPr/>
-        <p:txBody>
-          <a:bodyPr/>
-          <a:lstStyle/>
-          <a:p>
-            <a:r>
-              <a:t>Заключение</a:t>
-            </a:r>
-          </a:p>
-        </p:txBody>
-      </p:sp>
-      <p:sp>
-        <p:nvSpPr>
-          <p:cNvPr id="3" name="Content Placeholder 2"/>
-          <p:cNvSpPr>
-            <a:spLocks noGrp="1"/>
-          </p:cNvSpPr>
-          <p:nvPr>
-            <p:ph idx="1"/>
-          </p:nvPr>
-        </p:nvSpPr>
-        <p:spPr/>
-        <p:txBody>
-          <a:bodyPr/>
-          <a:lstStyle/>
-          <a:p>
-            <a:r>
               <a:rPr lang="ru-RU" dirty="0"/>
-              <a:t>Было создано приложение для криптовалюты.</a:t>
+              <a:t>Было создано приложение для криптовалюты, обладающее низким пороговым уровень для пользователя.</a:t>
             </a:r>
             <a:endParaRPr dirty="0"/>
           </a:p>

--- a/android-app/docs/media/presentation.pptx
+++ b/android-app/docs/media/presentation.pptx
@@ -5,7 +5,7 @@
     <p:sldMasterId id="2147483648" r:id="rId1"/>
   </p:sldMasterIdLst>
   <p:notesMasterIdLst>
-    <p:notesMasterId r:id="rId10"/>
+    <p:notesMasterId r:id="rId11"/>
   </p:notesMasterIdLst>
   <p:sldIdLst>
     <p:sldId id="256" r:id="rId2"/>
@@ -15,7 +15,8 @@
     <p:sldId id="266" r:id="rId6"/>
     <p:sldId id="262" r:id="rId7"/>
     <p:sldId id="267" r:id="rId8"/>
-    <p:sldId id="265" r:id="rId9"/>
+    <p:sldId id="268" r:id="rId9"/>
+    <p:sldId id="265" r:id="rId10"/>
   </p:sldIdLst>
   <p:sldSz cx="9144000" cy="6858000" type="screen4x3"/>
   <p:notesSz cx="6858000" cy="9144000"/>
@@ -4620,6 +4621,101 @@
 </file>
 
 <file path=ppt/slides/slide8.xml><?xml version="1.0" encoding="utf-8"?>
+<p:sld xmlns:a="http://schemas.openxmlformats.org/drawingml/2006/main" xmlns:r="http://schemas.openxmlformats.org/officeDocument/2006/relationships" xmlns:p="http://schemas.openxmlformats.org/presentationml/2006/main">
+  <p:cSld>
+    <p:spTree>
+      <p:nvGrpSpPr>
+        <p:cNvPr id="1" name=""/>
+        <p:cNvGrpSpPr/>
+        <p:nvPr/>
+      </p:nvGrpSpPr>
+      <p:grpSpPr>
+        <a:xfrm>
+          <a:off x="0" y="0"/>
+          <a:ext cx="0" cy="0"/>
+          <a:chOff x="0" y="0"/>
+          <a:chExt cx="0" cy="0"/>
+        </a:xfrm>
+      </p:grpSpPr>
+      <p:sp>
+        <p:nvSpPr>
+          <p:cNvPr id="2" name="Title 1">
+            <a:extLst>
+              <a:ext uri="{FF2B5EF4-FFF2-40B4-BE49-F238E27FC236}">
+                <a16:creationId xmlns:a16="http://schemas.microsoft.com/office/drawing/2014/main" id="{F2257E97-7B42-CA91-BA17-D3DE015DED8C}"/>
+              </a:ext>
+            </a:extLst>
+          </p:cNvPr>
+          <p:cNvSpPr>
+            <a:spLocks noGrp="1"/>
+          </p:cNvSpPr>
+          <p:nvPr>
+            <p:ph type="title"/>
+          </p:nvPr>
+        </p:nvSpPr>
+        <p:spPr/>
+        <p:txBody>
+          <a:bodyPr/>
+          <a:lstStyle/>
+          <a:p>
+            <a:pPr algn="l"/>
+            <a:r>
+              <a:rPr lang="ru-RU" dirty="0"/>
+              <a:t>Дальнейшее развитие</a:t>
+            </a:r>
+            <a:endParaRPr lang="en-AU" dirty="0"/>
+          </a:p>
+        </p:txBody>
+      </p:sp>
+      <p:sp>
+        <p:nvSpPr>
+          <p:cNvPr id="3" name="Content Placeholder 2">
+            <a:extLst>
+              <a:ext uri="{FF2B5EF4-FFF2-40B4-BE49-F238E27FC236}">
+                <a16:creationId xmlns:a16="http://schemas.microsoft.com/office/drawing/2014/main" id="{1924B9F4-498E-EC4E-F46C-A474EDCB7A13}"/>
+              </a:ext>
+            </a:extLst>
+          </p:cNvPr>
+          <p:cNvSpPr>
+            <a:spLocks noGrp="1"/>
+          </p:cNvSpPr>
+          <p:nvPr>
+            <p:ph idx="1"/>
+          </p:nvPr>
+        </p:nvSpPr>
+        <p:spPr/>
+        <p:txBody>
+          <a:bodyPr/>
+          <a:lstStyle/>
+          <a:p>
+            <a:r>
+              <a:rPr lang="ru-RU" dirty="0"/>
+              <a:t>Пополнение кошелька</a:t>
+            </a:r>
+          </a:p>
+          <a:p>
+            <a:r>
+              <a:rPr lang="ru-RU" dirty="0"/>
+              <a:t>Обмен криптовалютой между пользователями</a:t>
+            </a:r>
+            <a:endParaRPr lang="en-AU" dirty="0"/>
+          </a:p>
+        </p:txBody>
+      </p:sp>
+    </p:spTree>
+    <p:extLst>
+      <p:ext uri="{BB962C8B-B14F-4D97-AF65-F5344CB8AC3E}">
+        <p14:creationId xmlns:p14="http://schemas.microsoft.com/office/powerpoint/2010/main" val="900375084"/>
+      </p:ext>
+    </p:extLst>
+  </p:cSld>
+  <p:clrMapOvr>
+    <a:masterClrMapping/>
+  </p:clrMapOvr>
+</p:sld>
+</file>
+
+<file path=ppt/slides/slide9.xml><?xml version="1.0" encoding="utf-8"?>
 <p:sld xmlns:a="http://schemas.openxmlformats.org/drawingml/2006/main" xmlns:r="http://schemas.openxmlformats.org/officeDocument/2006/relationships" xmlns:p="http://schemas.openxmlformats.org/presentationml/2006/main">
   <p:cSld>
     <p:spTree>
